--- a/dist/초1/철학·논리·심리·교육·종교/배움과감정/초1_철학·논리·심리·교육·종교_배움과감정_01_할일나누기와느낌.pptx
+++ b/dist/초1/철학·논리·심리·교육·종교/배움과감정/초1_철학·논리·심리·교육·종교_배움과감정_01_할일나누기와느낌.pptx
@@ -119,45 +119,45 @@
   <p:extLst>
     <p:ext uri="{521415D9-36F7-43E2-AB2F-B90AF26B5E84}">
       <p14:sectionLst xmlns:p14="http://schemas.microsoft.com/office/powerpoint/2010/main">
-        <p14:section name="도입" id="{407ee885-f63c-38d1-2289-fe9377603110}">
+        <p14:section name="도입" id="{708c4704-87f3-f7fe-f10a-30f2e90e405e}">
           <p14:sldIdLst>
             <p14:sldId id="256"/>
             <p14:sldId id="257"/>
           </p14:sldIdLst>
         </p14:section>
-        <p14:section name="개념" id="{e21d0fbc-0b87-d38e-1975-faa096c4a9bf}">
+        <p14:section name="개념" id="{9ede4bf9-dbba-edde-8f0e-66571bfaeaf1}">
           <p14:sldIdLst>
             <p14:sldId id="258"/>
             <p14:sldId id="259"/>
             <p14:sldId id="261"/>
           </p14:sldIdLst>
         </p14:section>
-        <p14:section name="연습" id="{d4ed6c95-56ba-31e6-540d-41af88f21b0b}">
+        <p14:section name="연습" id="{708ca0a5-8930-e874-83d7-9b582ff10ce5}">
           <p14:sldIdLst>
             <p14:sldId id="260"/>
             <p14:sldId id="262"/>
             <p14:sldId id="263"/>
           </p14:sldIdLst>
         </p14:section>
-        <p14:section name="개념" id="{4e69c2d1-eea6-be08-2fa9-5c00323f2fec}">
+        <p14:section name="개념" id="{322b5b3d-031b-e55c-9751-c6ee5fe80228}">
           <p14:sldIdLst/>
         </p14:section>
-        <p14:section name="연습" id="{dc696522-e2fc-11b6-0d8a-d57c20ed7031}">
+        <p14:section name="연습" id="{302c9e60-3374-2419-22ca-7d55e6853aeb}">
           <p14:sldIdLst/>
         </p14:section>
-        <p14:section name="확인" id="{25e8917a-f43d-d2e4-0c1b-0473c55ae563}">
+        <p14:section name="확인" id="{15d460e4-b7f0-21b3-ee1f-b33d568ac19c}">
           <p14:sldIdLst>
             <p14:sldId id="264"/>
             <p14:sldId id="265"/>
             <p14:sldId id="266"/>
           </p14:sldIdLst>
         </p14:section>
-        <p14:section name="정리" id="{076e0aa8-e07e-ffa0-2e58-2bc53068e027}">
+        <p14:section name="정리" id="{63f29b07-e611-acac-dbe9-2cd48d63f82c}">
           <p14:sldIdLst>
             <p14:sldId id="267"/>
           </p14:sldIdLst>
         </p14:section>
-        <p14:section name="보충" id="{482098e4-a031-2898-9160-add0dedb1450}">
+        <p14:section name="보충" id="{f497bf68-e832-05ee-cef5-95102e553f72}">
           <p14:sldIdLst>
             <p14:sldId id="268"/>
           </p14:sldIdLst>
